--- a/docs/content/one_way_anova_2/one_way_anova_2_activity.pptx
+++ b/docs/content/one_way_anova_2/one_way_anova_2_activity.pptx
@@ -3292,7 +3292,7 @@
             </a:pPr>
             <a:r>
               <a:rPr/>
-              <a:t>Worksheet 14 — One-Way ANOVA II: Running &amp; Reporting</a:t>
+              <a:t>Worksheet — One-Way ANOVA II: Running, Reporting &amp; Extension</a:t>
             </a:r>
           </a:p>
         </p:txBody>
@@ -3681,7 +3681,7 @@
             </a:pPr>
             <a:r>
               <a:rPr/>
-              <a:t>Part 13 · Going further</a:t>
+              <a:t>Extension — out of class (~30–40 min)</a:t>
             </a:r>
           </a:p>
         </p:txBody>
@@ -3701,12 +3701,80 @@
           <a:bodyPr/>
           <a:lstStyle/>
           <a:p>
+            <a:pPr lvl="0" indent="0" marL="0">
+              <a:buNone/>
+            </a:pPr>
+            <a:r>
+              <a:rPr i="1"/>
+              <a:t>Turn this in with your worksheet. It runs the </a:t>
+            </a:r>
+            <a:r>
+              <a:rPr b="1" i="1"/>
+              <a:t>exact</a:t>
+            </a:r>
+            <a:r>
+              <a:rPr i="1"/>
+              <a:t> analysis you just did — but on </a:t>
+            </a:r>
+            <a:r>
+              <a:rPr b="1" i="1"/>
+              <a:t>one half</a:t>
+            </a:r>
+            <a:r>
+              <a:rPr i="1"/>
+              <a:t> of the data that only you chose, so your F, </a:t>
+            </a:r>
+            <a:r>
+              <a:rPr/>
+              <a:t>p</a:t>
+            </a:r>
+            <a:r>
+              <a:rPr i="1"/>
+              <a:t>, and letters will be your own.</a:t>
+            </a:r>
+          </a:p>
+          <a:p>
             <a:pPr lvl="0" indent="0" marL="1270000">
               <a:buNone/>
             </a:pPr>
             <a:r>
+              <a:rPr sz="2000" b="1"/>
+              <a:t>Important</a:t>
+            </a:r>
+          </a:p>
+          <a:p>
+            <a:pPr lvl="0" indent="0" marL="1270000">
+              <a:buNone/>
+            </a:pPr>
+            <a:r>
               <a:rPr sz="2000"/>
-              <a:t>Optional — do this if you finish early or want to push deeper.</a:t>
+              <a:t>The prediction and explanation in </a:t>
+            </a:r>
+            <a:r>
+              <a:rPr sz="2000" b="1"/>
+              <a:t>E2 and E3 must be handwritten</a:t>
+            </a:r>
+            <a:r>
+              <a:rPr sz="2000"/>
+              <a:t> on paper, photographed, and embedded in your submission (</a:t>
+            </a:r>
+            <a:r>
+              <a:rPr sz="2000">
+                <a:latin typeface="Courier"/>
+              </a:rPr>
+              <a:t>![caption](my_photo.jpg)</a:t>
+            </a:r>
+            <a:r>
+              <a:rPr sz="2000"/>
+              <a:t>). Typed answers to E2/E3 receive </a:t>
+            </a:r>
+            <a:r>
+              <a:rPr sz="2000" b="1"/>
+              <a:t>at most half credit, even if correct</a:t>
+            </a:r>
+            <a:r>
+              <a:rPr sz="2000"/>
+              <a:t> — I want to see your own reasoning develop on the page.</a:t>
             </a:r>
           </a:p>
           <a:p>
@@ -3718,7 +3786,7 @@
             </a:pPr>
             <a:r>
               <a:rPr b="1"/>
-              <a:t>Try a different response variable</a:t>
+              <a:t>E1 · Refit on one sex only (3 pts)</a:t>
             </a:r>
           </a:p>
           <a:p>
@@ -3726,22 +3794,40 @@
               <a:buNone/>
             </a:pPr>
             <a:r>
+              <a:rPr/>
+              <a:t>Everyone above ran the identical analysis on the full dataset, so everyone’s numbers match. Not anymore. </a:t>
+            </a:r>
+            <a:r>
               <a:rPr b="1"/>
-              <a:t>▶ Try this:</a:t>
-            </a:r>
-            <a:r>
-              <a:rPr/>
-              <a:t> repeat the whole workflow for </a:t>
-            </a:r>
-            <a:r>
-              <a:rPr>
-                <a:latin typeface="Courier"/>
-              </a:rPr>
-              <a:t>flipper_length_mm</a:t>
-            </a:r>
-            <a:r>
-              <a:rPr/>
-              <a:t> instead of body mass.</a:t>
+              <a:t>Pick one sex — </a:t>
+            </a:r>
+            <a:r>
+              <a:rPr b="1">
+                <a:latin typeface="Courier"/>
+              </a:rPr>
+              <a:t>"male"</a:t>
+            </a:r>
+            <a:r>
+              <a:rPr b="1"/>
+              <a:t> or </a:t>
+            </a:r>
+            <a:r>
+              <a:rPr b="1">
+                <a:latin typeface="Courier"/>
+              </a:rPr>
+              <a:t>"female"</a:t>
+            </a:r>
+            <a:r>
+              <a:rPr/>
+              <a:t> — and re-run the whole ANOVA on only that half. Write down which you picked </a:t>
+            </a:r>
+            <a:r>
+              <a:rPr i="1"/>
+              <a:t>before</a:t>
+            </a:r>
+            <a:r>
+              <a:rPr/>
+              <a:t> you start.</a:t>
             </a:r>
           </a:p>
           <a:p>
@@ -3755,7 +3841,7 @@
                 </a:solidFill>
                 <a:latin typeface="Courier"/>
               </a:rPr>
-              <a:t># One-way ANOVA on flipper length -----------------------</a:t>
+              <a:t># Replace ___ with "male" or "female"</a:t>
             </a:r>
             <a:br/>
             <a:r>
@@ -3765,7 +3851,7 @@
                 </a:solidFill>
                 <a:latin typeface="Courier"/>
               </a:rPr>
-              <a:t>flipper_df &lt;- penguins </a:t>
+              <a:t>penguins_sex &lt;- penguins </a:t>
             </a:r>
             <a:r>
               <a:rPr>
@@ -3776,6 +3862,80 @@
               </a:rPr>
               <a:t>%&gt;%</a:t>
             </a:r>
+            <a:br/>
+            <a:r>
+              <a:rPr>
+                <a:solidFill>
+                  <a:srgbClr val="003B4F"/>
+                </a:solidFill>
+                <a:latin typeface="Courier"/>
+              </a:rPr>
+              <a:t>  </a:t>
+            </a:r>
+            <a:r>
+              <a:rPr>
+                <a:solidFill>
+                  <a:srgbClr val="4758AB"/>
+                </a:solidFill>
+                <a:latin typeface="Courier"/>
+              </a:rPr>
+              <a:t>drop_na</a:t>
+            </a:r>
+            <a:r>
+              <a:rPr>
+                <a:solidFill>
+                  <a:srgbClr val="003B4F"/>
+                </a:solidFill>
+                <a:latin typeface="Courier"/>
+              </a:rPr>
+              <a:t>(body_mass_g, species, sex) </a:t>
+            </a:r>
+            <a:r>
+              <a:rPr>
+                <a:solidFill>
+                  <a:srgbClr val="5E5E5E"/>
+                </a:solidFill>
+                <a:latin typeface="Courier"/>
+              </a:rPr>
+              <a:t>%&gt;%</a:t>
+            </a:r>
+            <a:br/>
+            <a:r>
+              <a:rPr>
+                <a:solidFill>
+                  <a:srgbClr val="003B4F"/>
+                </a:solidFill>
+                <a:latin typeface="Courier"/>
+              </a:rPr>
+              <a:t>  </a:t>
+            </a:r>
+            <a:r>
+              <a:rPr>
+                <a:solidFill>
+                  <a:srgbClr val="4758AB"/>
+                </a:solidFill>
+                <a:latin typeface="Courier"/>
+              </a:rPr>
+              <a:t>filter</a:t>
+            </a:r>
+            <a:r>
+              <a:rPr>
+                <a:solidFill>
+                  <a:srgbClr val="003B4F"/>
+                </a:solidFill>
+                <a:latin typeface="Courier"/>
+              </a:rPr>
+              <a:t>(sex </a:t>
+            </a:r>
+            <a:r>
+              <a:rPr>
+                <a:solidFill>
+                  <a:srgbClr val="5E5E5E"/>
+                </a:solidFill>
+                <a:latin typeface="Courier"/>
+              </a:rPr>
+              <a:t>==</a:t>
+            </a:r>
             <a:r>
               <a:rPr>
                 <a:solidFill>
@@ -3788,94 +3948,95 @@
             <a:r>
               <a:rPr>
                 <a:solidFill>
-                  <a:srgbClr val="4758AB"/>
-                </a:solidFill>
-                <a:latin typeface="Courier"/>
-              </a:rPr>
-              <a:t>drop_na</a:t>
-            </a:r>
-            <a:r>
-              <a:rPr>
-                <a:solidFill>
-                  <a:srgbClr val="003B4F"/>
-                </a:solidFill>
-                <a:latin typeface="Courier"/>
-              </a:rPr>
-              <a:t>(flipper_length_mm, species)</a:t>
-            </a:r>
-            <a:br/>
-            <a:r>
-              <a:rPr>
-                <a:solidFill>
-                  <a:srgbClr val="003B4F"/>
-                </a:solidFill>
-                <a:latin typeface="Courier"/>
-              </a:rPr>
-              <a:t>flipper_model &lt;- </a:t>
-            </a:r>
-            <a:r>
-              <a:rPr>
-                <a:solidFill>
-                  <a:srgbClr val="4758AB"/>
-                </a:solidFill>
-                <a:latin typeface="Courier"/>
-              </a:rPr>
-              <a:t>lm</a:t>
-            </a:r>
-            <a:r>
-              <a:rPr>
-                <a:solidFill>
-                  <a:srgbClr val="003B4F"/>
-                </a:solidFill>
-                <a:latin typeface="Courier"/>
-              </a:rPr>
-              <a:t>(flipper_length_mm </a:t>
-            </a:r>
-            <a:r>
-              <a:rPr>
-                <a:solidFill>
-                  <a:srgbClr val="5E5E5E"/>
-                </a:solidFill>
-                <a:latin typeface="Courier"/>
-              </a:rPr>
-              <a:t>~</a:t>
-            </a:r>
-            <a:r>
-              <a:rPr>
-                <a:solidFill>
-                  <a:srgbClr val="003B4F"/>
-                </a:solidFill>
-                <a:latin typeface="Courier"/>
-              </a:rPr>
-              <a:t> species, </a:t>
-            </a:r>
-            <a:r>
-              <a:rPr>
-                <a:solidFill>
-                  <a:srgbClr val="657422"/>
-                </a:solidFill>
-                <a:latin typeface="Courier"/>
-              </a:rPr>
-              <a:t>data =</a:t>
-            </a:r>
-            <a:r>
-              <a:rPr>
-                <a:solidFill>
-                  <a:srgbClr val="003B4F"/>
-                </a:solidFill>
-                <a:latin typeface="Courier"/>
-              </a:rPr>
-              <a:t> flipper_df)</a:t>
+                  <a:srgbClr val="20794D"/>
+                </a:solidFill>
+                <a:latin typeface="Courier"/>
+              </a:rPr>
+              <a:t>"___"</a:t>
+            </a:r>
+            <a:r>
+              <a:rPr>
+                <a:solidFill>
+                  <a:srgbClr val="003B4F"/>
+                </a:solidFill>
+                <a:latin typeface="Courier"/>
+              </a:rPr>
+              <a:t>)</a:t>
             </a:r>
             <a:br/>
             <a:br/>
             <a:r>
               <a:rPr>
                 <a:solidFill>
+                  <a:srgbClr val="003B4F"/>
+                </a:solidFill>
+                <a:latin typeface="Courier"/>
+              </a:rPr>
+              <a:t>sex_model &lt;- </a:t>
+            </a:r>
+            <a:r>
+              <a:rPr>
+                <a:solidFill>
                   <a:srgbClr val="4758AB"/>
                 </a:solidFill>
                 <a:latin typeface="Courier"/>
               </a:rPr>
+              <a:t>lm</a:t>
+            </a:r>
+            <a:r>
+              <a:rPr>
+                <a:solidFill>
+                  <a:srgbClr val="003B4F"/>
+                </a:solidFill>
+                <a:latin typeface="Courier"/>
+              </a:rPr>
+              <a:t>(body_mass_g </a:t>
+            </a:r>
+            <a:r>
+              <a:rPr>
+                <a:solidFill>
+                  <a:srgbClr val="5E5E5E"/>
+                </a:solidFill>
+                <a:latin typeface="Courier"/>
+              </a:rPr>
+              <a:t>~</a:t>
+            </a:r>
+            <a:r>
+              <a:rPr>
+                <a:solidFill>
+                  <a:srgbClr val="003B4F"/>
+                </a:solidFill>
+                <a:latin typeface="Courier"/>
+              </a:rPr>
+              <a:t> species, </a:t>
+            </a:r>
+            <a:r>
+              <a:rPr>
+                <a:solidFill>
+                  <a:srgbClr val="657422"/>
+                </a:solidFill>
+                <a:latin typeface="Courier"/>
+              </a:rPr>
+              <a:t>data =</a:t>
+            </a:r>
+            <a:r>
+              <a:rPr>
+                <a:solidFill>
+                  <a:srgbClr val="003B4F"/>
+                </a:solidFill>
+                <a:latin typeface="Courier"/>
+              </a:rPr>
+              <a:t> penguins_sex)</a:t>
+            </a:r>
+            <a:br/>
+            <a:br/>
+            <a:r>
+              <a:rPr>
+                <a:solidFill>
+                  <a:srgbClr val="4758AB"/>
+                </a:solidFill>
+                <a:latin typeface="Courier"/>
+              </a:rPr>
               <a:t>Anova</a:t>
             </a:r>
             <a:r>
@@ -3885,7 +4046,7 @@
                 </a:solidFill>
                 <a:latin typeface="Courier"/>
               </a:rPr>
-              <a:t>(flipper_model, </a:t>
+              <a:t>(sex_model, </a:t>
             </a:r>
             <a:r>
               <a:rPr>
@@ -3921,7 +4082,16 @@
                 </a:solidFill>
                 <a:latin typeface="Courier"/>
               </a:rPr>
-              <a:t>)</a:t>
+              <a:t>)                     </a:t>
+            </a:r>
+            <a:r>
+              <a:rPr>
+                <a:solidFill>
+                  <a:srgbClr val="5E5E5E"/>
+                </a:solidFill>
+                <a:latin typeface="Courier"/>
+              </a:rPr>
+              <a:t># new F, df, p</a:t>
             </a:r>
             <a:br/>
             <a:r>
@@ -3940,7 +4110,7 @@
                 </a:solidFill>
                 <a:latin typeface="Courier"/>
               </a:rPr>
-              <a:t>(flipper_model, pairwise </a:t>
+              <a:t>(sex_model, pairwise </a:t>
             </a:r>
             <a:r>
               <a:rPr>
@@ -3976,7 +4146,16 @@
                 </a:solidFill>
                 <a:latin typeface="Courier"/>
               </a:rPr>
-              <a:t>contrasts</a:t>
+              <a:t>contrasts  </a:t>
+            </a:r>
+            <a:r>
+              <a:rPr>
+                <a:solidFill>
+                  <a:srgbClr val="5E5E5E"/>
+                </a:solidFill>
+                <a:latin typeface="Courier"/>
+              </a:rPr>
+              <a:t># which pairs differ now</a:t>
             </a:r>
           </a:p>
           <a:p>
@@ -3989,11 +4168,7 @@
             </a:r>
             <a:r>
               <a:rPr b="1"/>
-              <a:t>Your turn:</a:t>
-            </a:r>
-            <a:r>
-              <a:rPr/>
-              <a:t> Do the species differ in flipper length the same way they differ in mass?</a:t>
+              <a:t>Record:</a:t>
             </a:r>
           </a:p>
           <a:p>
@@ -4004,7 +4179,10 @@
               <a:rPr>
                 <a:latin typeface="Courier"/>
               </a:rPr>
-              <a:t>Your answer:</a:t>
+              <a:t>Sex chosen:
+n (nrow(penguins_sex)):
+F(__, __) =            p =
+Pairs that differ now (Adelie–Chinstrap / Adelie–Gentoo / Chinstrap–Gentoo):</a:t>
             </a:r>
           </a:p>
           <a:p>
@@ -4016,7 +4194,7 @@
             </a:pPr>
             <a:r>
               <a:rPr b="1"/>
-              <a:t>Compare across islands</a:t>
+              <a:t>E2 · Predict, then check — ✍️ by hand (3 pts)</a:t>
             </a:r>
           </a:p>
           <a:p>
@@ -4025,200 +4203,45 @@
             </a:pPr>
             <a:r>
               <a:rPr b="1"/>
-              <a:t>▶ Try this:</a:t>
-            </a:r>
-            <a:r>
-              <a:rPr/>
-              <a:t> use </a:t>
-            </a:r>
-            <a:r>
-              <a:rPr>
-                <a:latin typeface="Courier"/>
-              </a:rPr>
-              <a:t>island</a:t>
-            </a:r>
-            <a:r>
-              <a:rPr/>
-              <a:t> as the grouping variable instead of </a:t>
-            </a:r>
-            <a:r>
-              <a:rPr>
-                <a:latin typeface="Courier"/>
-              </a:rPr>
-              <a:t>species</a:t>
-            </a:r>
-            <a:r>
-              <a:rPr/>
-              <a:t>.</a:t>
-            </a:r>
-          </a:p>
-          <a:p>
-            <a:pPr lvl="0" indent="0">
-              <a:buNone/>
-            </a:pPr>
-            <a:r>
-              <a:rPr>
-                <a:solidFill>
-                  <a:srgbClr val="003B4F"/>
-                </a:solidFill>
-                <a:latin typeface="Courier"/>
-              </a:rPr>
-              <a:t>island_df &lt;- penguins </a:t>
-            </a:r>
-            <a:r>
-              <a:rPr>
-                <a:solidFill>
-                  <a:srgbClr val="5E5E5E"/>
-                </a:solidFill>
-                <a:latin typeface="Courier"/>
-              </a:rPr>
-              <a:t>%&gt;%</a:t>
-            </a:r>
-            <a:r>
-              <a:rPr>
-                <a:solidFill>
-                  <a:srgbClr val="003B4F"/>
-                </a:solidFill>
-                <a:latin typeface="Courier"/>
-              </a:rPr>
-              <a:t> </a:t>
-            </a:r>
-            <a:r>
-              <a:rPr>
-                <a:solidFill>
-                  <a:srgbClr val="4758AB"/>
-                </a:solidFill>
-                <a:latin typeface="Courier"/>
-              </a:rPr>
-              <a:t>drop_na</a:t>
-            </a:r>
-            <a:r>
-              <a:rPr>
-                <a:solidFill>
-                  <a:srgbClr val="003B4F"/>
-                </a:solidFill>
-                <a:latin typeface="Courier"/>
-              </a:rPr>
-              <a:t>(body_mass_g, island)</a:t>
-            </a:r>
-            <a:br/>
-            <a:r>
-              <a:rPr>
-                <a:solidFill>
-                  <a:srgbClr val="003B4F"/>
-                </a:solidFill>
-                <a:latin typeface="Courier"/>
-              </a:rPr>
-              <a:t>island_model &lt;- </a:t>
-            </a:r>
-            <a:r>
-              <a:rPr>
-                <a:solidFill>
-                  <a:srgbClr val="4758AB"/>
-                </a:solidFill>
-                <a:latin typeface="Courier"/>
-              </a:rPr>
-              <a:t>lm</a:t>
-            </a:r>
-            <a:r>
-              <a:rPr>
-                <a:solidFill>
-                  <a:srgbClr val="003B4F"/>
-                </a:solidFill>
-                <a:latin typeface="Courier"/>
-              </a:rPr>
-              <a:t>(body_mass_g </a:t>
-            </a:r>
-            <a:r>
-              <a:rPr>
-                <a:solidFill>
-                  <a:srgbClr val="5E5E5E"/>
-                </a:solidFill>
-                <a:latin typeface="Courier"/>
-              </a:rPr>
-              <a:t>~</a:t>
-            </a:r>
-            <a:r>
-              <a:rPr>
-                <a:solidFill>
-                  <a:srgbClr val="003B4F"/>
-                </a:solidFill>
-                <a:latin typeface="Courier"/>
-              </a:rPr>
-              <a:t> island, </a:t>
-            </a:r>
-            <a:r>
-              <a:rPr>
-                <a:solidFill>
-                  <a:srgbClr val="657422"/>
-                </a:solidFill>
-                <a:latin typeface="Courier"/>
-              </a:rPr>
-              <a:t>data =</a:t>
-            </a:r>
-            <a:r>
-              <a:rPr>
-                <a:solidFill>
-                  <a:srgbClr val="003B4F"/>
-                </a:solidFill>
-                <a:latin typeface="Courier"/>
-              </a:rPr>
-              <a:t> island_df)</a:t>
-            </a:r>
-            <a:br/>
-            <a:r>
-              <a:rPr>
-                <a:solidFill>
-                  <a:srgbClr val="4758AB"/>
-                </a:solidFill>
-                <a:latin typeface="Courier"/>
-              </a:rPr>
-              <a:t>Anova</a:t>
-            </a:r>
-            <a:r>
-              <a:rPr>
-                <a:solidFill>
-                  <a:srgbClr val="003B4F"/>
-                </a:solidFill>
-                <a:latin typeface="Courier"/>
-              </a:rPr>
-              <a:t>(island_model, </a:t>
-            </a:r>
-            <a:r>
-              <a:rPr>
-                <a:solidFill>
-                  <a:srgbClr val="657422"/>
-                </a:solidFill>
-                <a:latin typeface="Courier"/>
-              </a:rPr>
-              <a:t>type =</a:t>
-            </a:r>
-            <a:r>
-              <a:rPr>
-                <a:solidFill>
-                  <a:srgbClr val="003B4F"/>
-                </a:solidFill>
-                <a:latin typeface="Courier"/>
-              </a:rPr>
-              <a:t> </a:t>
-            </a:r>
-            <a:r>
-              <a:rPr>
-                <a:solidFill>
-                  <a:srgbClr val="20794D"/>
-                </a:solidFill>
-                <a:latin typeface="Courier"/>
-              </a:rPr>
-              <a:t>"II"</a:t>
-            </a:r>
-            <a:r>
-              <a:rPr>
-                <a:solidFill>
-                  <a:srgbClr val="003B4F"/>
-                </a:solidFill>
-                <a:latin typeface="Courier"/>
-              </a:rPr>
-              <a:t>)</a:t>
+              <a:t>Before running E1</a:t>
+            </a:r>
+            <a:r>
+              <a:rPr/>
+              <a:t>, on paper, write:</a:t>
+            </a:r>
+          </a:p>
+          <a:p>
+            <a:pPr lvl="0" indent="-342900" marL="342900">
+              <a:buAutoNum type="arabicPeriod"/>
+            </a:pPr>
+            <a:r>
+              <a:rPr/>
+              <a:t>Will restricting to one sex change </a:t>
+            </a:r>
+            <a:r>
+              <a:rPr b="1"/>
+              <a:t>which</a:t>
+            </a:r>
+            <a:r>
+              <a:rPr/>
+              <a:t> species pairs differ, compared with your full-data result in Part 9?</a:t>
+            </a:r>
+          </a:p>
+          <a:p>
+            <a:pPr lvl="0" indent="-342900" marL="342900">
+              <a:buAutoNum type="arabicPeriod"/>
+            </a:pPr>
+            <a:r>
+              <a:rPr/>
+              <a:t>Will the F-statistic get </a:t>
+            </a:r>
+            <a:r>
+              <a:rPr b="1"/>
+              <a:t>bigger or smaller</a:t>
+            </a:r>
+            <a:r>
+              <a:rPr/>
+              <a:t>, and why? Think about what happens to (a) sample size and (b) within-group spread when you drop half the penguins.</a:t>
             </a:r>
           </a:p>
           <a:p>
@@ -4227,26 +4250,132 @@
             </a:pPr>
             <a:r>
               <a:rPr/>
-              <a:t>✏️ </a:t>
+              <a:t>Then run E1 and, still by hand, write your </a:t>
             </a:r>
             <a:r>
               <a:rPr b="1"/>
-              <a:t>Your turn:</a:t>
-            </a:r>
-            <a:r>
-              <a:rPr/>
-              <a:t> Why might comparing by island be misleading here? (Hint: which species live on which islands?)</a:t>
-            </a:r>
-          </a:p>
-          <a:p>
-            <a:pPr lvl="0" indent="0">
-              <a:buNone/>
-            </a:pPr>
-            <a:r>
-              <a:rPr>
-                <a:latin typeface="Courier"/>
-              </a:rPr>
-              <a:t>Your answer:</a:t>
+              <a:t>actual</a:t>
+            </a:r>
+            <a:r>
+              <a:rPr/>
+              <a:t> F and </a:t>
+            </a:r>
+            <a:r>
+              <a:rPr i="1"/>
+              <a:t>p</a:t>
+            </a:r>
+            <a:r>
+              <a:rPr/>
+              <a:t> and whether your prediction held.</a:t>
+            </a:r>
+          </a:p>
+          <a:p>
+            <a:pPr lvl="0" indent="0" marL="0">
+              <a:spcBef>
+                <a:spcPts val="3000"/>
+              </a:spcBef>
+              <a:buNone/>
+            </a:pPr>
+            <a:r>
+              <a:rPr b="1"/>
+              <a:t>E3 · Explain it — ✍️ by hand, with YOUR numbers (3 pts)</a:t>
+            </a:r>
+          </a:p>
+          <a:p>
+            <a:pPr lvl="0" indent="0" marL="0">
+              <a:buNone/>
+            </a:pPr>
+            <a:r>
+              <a:rPr/>
+              <a:t>Using your real output from E1 (not the class example):</a:t>
+            </a:r>
+          </a:p>
+          <a:p>
+            <a:pPr lvl="0" indent="-342900" marL="342900">
+              <a:buAutoNum type="arabicPeriod"/>
+            </a:pPr>
+            <a:r>
+              <a:rPr/>
+              <a:t>State H₀ and Hₐ for your one-sex test.</a:t>
+            </a:r>
+          </a:p>
+          <a:p>
+            <a:pPr lvl="0" indent="-342900" marL="342900">
+              <a:buAutoNum type="arabicPeriod"/>
+            </a:pPr>
+            <a:r>
+              <a:rPr/>
+              <a:t>In plain language, say which species differ and which don’t — and why a significant overall F </a:t>
+            </a:r>
+            <a:r>
+              <a:rPr i="1"/>
+              <a:t>by itself</a:t>
+            </a:r>
+            <a:r>
+              <a:rPr/>
+              <a:t> would not have told you that.</a:t>
+            </a:r>
+          </a:p>
+          <a:p>
+            <a:pPr lvl="0" indent="-342900" marL="342900">
+              <a:buAutoNum type="arabicPeriod"/>
+            </a:pPr>
+            <a:r>
+              <a:rPr/>
+              <a:t>Compare your E1 F and </a:t>
+            </a:r>
+            <a:r>
+              <a:rPr i="1"/>
+              <a:t>p</a:t>
+            </a:r>
+            <a:r>
+              <a:rPr/>
+              <a:t> to the full-data F and </a:t>
+            </a:r>
+            <a:r>
+              <a:rPr i="1"/>
+              <a:t>p</a:t>
+            </a:r>
+            <a:r>
+              <a:rPr/>
+              <a:t> from Part 7. Explain why they differ (or are surprisingly similar) even though you cut </a:t>
+            </a:r>
+            <a:r>
+              <a:rPr i="1"/>
+              <a:t>n</a:t>
+            </a:r>
+            <a:r>
+              <a:rPr/>
+              <a:t> roughly in half.</a:t>
+            </a:r>
+          </a:p>
+          <a:p>
+            <a:pPr lvl="0" indent="0" marL="1270000">
+              <a:buNone/>
+            </a:pPr>
+            <a:r>
+              <a:rPr sz="2000"/>
+              <a:t>Optional, no points: rerun E1 for </a:t>
+            </a:r>
+            <a:r>
+              <a:rPr sz="2000">
+                <a:latin typeface="Courier"/>
+              </a:rPr>
+              <a:t>flipper_length_mm</a:t>
+            </a:r>
+            <a:r>
+              <a:rPr sz="2000"/>
+              <a:t> instead of </a:t>
+            </a:r>
+            <a:r>
+              <a:rPr sz="2000">
+                <a:latin typeface="Courier"/>
+              </a:rPr>
+              <a:t>body_mass_g</a:t>
+            </a:r>
+            <a:r>
+              <a:rPr sz="2000"/>
+              <a:t> and see whether the species separate the same way.</a:t>
             </a:r>
           </a:p>
         </p:txBody>
@@ -4534,7 +4663,7 @@
             </a:pPr>
             <a:r>
               <a:rPr i="1"/>
-              <a:t>End of Worksheet 14. Next: Worksheet 15 — kicking off the final project.</a:t>
+              <a:t>End of the ANOVA II worksheet. Next: kicking off the final project.</a:t>
             </a:r>
           </a:p>
         </p:txBody>
@@ -4614,7 +4743,7 @@
             </a:pPr>
             <a:r>
               <a:rPr b="1"/>
-              <a:t>Recap from Worksheet 13</a:t>
+              <a:t>Recap from the ANOVA I worksheet</a:t>
             </a:r>
           </a:p>
           <a:p>
@@ -4819,11 +4948,11 @@
             </a:r>
             <a:r>
               <a:rPr sz="2000" b="1"/>
-              <a:t>Going further</a:t>
+              <a:t>Extension</a:t>
             </a:r>
             <a:r>
               <a:rPr sz="2000"/>
-              <a:t> section is optional.</a:t>
+              <a:t> at the end is done out of class (~30–40 min) and turned in with the worksheet.</a:t>
             </a:r>
           </a:p>
           <a:p>
@@ -5144,7 +5273,7 @@
             </a:r>
             <a:r>
               <a:rPr/>
-              <a:t> (same model as the end of Worksheet 13):</a:t>
+              <a:t> (same model as the end of the ANOVA I worksheet):</a:t>
             </a:r>
           </a:p>
           <a:p>
